--- a/powerpoint_slides.pptx
+++ b/powerpoint_slides.pptx
@@ -10322,7 +10322,7 @@
                   <a:srgbClr val="2E7D32"/>
                 </a:solidFill>
               </a:rPr>
-              <a:t>PR</a:t>
+              <a:t>PA</a:t>
             </a:r>
           </a:p>
         </p:txBody>
@@ -10356,7 +10356,7 @@
                   <a:srgbClr val="212121"/>
                 </a:solidFill>
               </a:rPr>
-              <a:t>Paraná</a:t>
+              <a:t>Pará</a:t>
             </a:r>
           </a:p>
         </p:txBody>
@@ -10390,7 +10390,7 @@
                   <a:srgbClr val="555555"/>
                 </a:solidFill>
               </a:rPr>
-              <a:t>R$ 651,153</a:t>
+              <a:t>R$ 218,296</a:t>
             </a:r>
           </a:p>
         </p:txBody>
@@ -10424,7 +10424,7 @@
                   <a:srgbClr val="0D47A1"/>
                 </a:solidFill>
               </a:rPr>
-              <a:t>R$ 1,006,196</a:t>
+              <a:t>R$ 519,263</a:t>
             </a:r>
           </a:p>
         </p:txBody>
@@ -10458,7 +10458,7 @@
                   <a:srgbClr val="2E7D32"/>
                 </a:solidFill>
               </a:rPr>
-              <a:t>+R$ 355,043</a:t>
+              <a:t>+R$ 300,967</a:t>
             </a:r>
           </a:p>
         </p:txBody>
@@ -10492,7 +10492,7 @@
                   <a:srgbClr val="555555"/>
                 </a:solidFill>
               </a:rPr>
-              <a:t>R$ 545B</a:t>
+              <a:t>R$ 297B</a:t>
             </a:r>
           </a:p>
         </p:txBody>
@@ -10569,7 +10569,7 @@
                   <a:srgbClr val="2E7D32"/>
                 </a:solidFill>
               </a:rPr>
-              <a:t>BA</a:t>
+              <a:t>CE</a:t>
             </a:r>
           </a:p>
         </p:txBody>
@@ -10603,7 +10603,7 @@
                   <a:srgbClr val="212121"/>
                 </a:solidFill>
               </a:rPr>
-              <a:t>Bahia</a:t>
+              <a:t>Ceará</a:t>
             </a:r>
           </a:p>
         </p:txBody>
@@ -10637,7 +10637,7 @@
                   <a:srgbClr val="555555"/>
                 </a:solidFill>
               </a:rPr>
-              <a:t>R$ 493,802</a:t>
+              <a:t>R$ 279,464</a:t>
             </a:r>
           </a:p>
         </p:txBody>
@@ -10671,7 +10671,7 @@
                   <a:srgbClr val="0D47A1"/>
                 </a:solidFill>
               </a:rPr>
-              <a:t>R$ 824,963</a:t>
+              <a:t>R$ 503,588</a:t>
             </a:r>
           </a:p>
         </p:txBody>
@@ -10705,7 +10705,7 @@
                   <a:srgbClr val="2E7D32"/>
                 </a:solidFill>
               </a:rPr>
-              <a:t>+R$ 331,160</a:t>
+              <a:t>+R$ 224,124</a:t>
             </a:r>
           </a:p>
         </p:txBody>
@@ -10739,7 +10739,7 @@
                   <a:srgbClr val="555555"/>
                 </a:solidFill>
               </a:rPr>
-              <a:t>R$ 447B</a:t>
+              <a:t>R$ 288B</a:t>
             </a:r>
           </a:p>
         </p:txBody>
@@ -10884,7 +10884,7 @@
                   <a:srgbClr val="555555"/>
                 </a:solidFill>
               </a:rPr>
-              <a:t>R$ 267,884</a:t>
+              <a:t>R$ 324,850</a:t>
             </a:r>
           </a:p>
         </p:txBody>
@@ -10918,7 +10918,7 @@
                   <a:srgbClr val="0D47A1"/>
                 </a:solidFill>
               </a:rPr>
-              <a:t>R$ 572,860</a:t>
+              <a:t>R$ 542,571</a:t>
             </a:r>
           </a:p>
         </p:txBody>
@@ -10952,7 +10952,7 @@
                   <a:srgbClr val="2E7D32"/>
                 </a:solidFill>
               </a:rPr>
-              <a:t>+R$ 304,976</a:t>
+              <a:t>+R$ 217,721</a:t>
             </a:r>
           </a:p>
         </p:txBody>
@@ -11063,7 +11063,7 @@
                   <a:srgbClr val="2E7D32"/>
                 </a:solidFill>
               </a:rPr>
-              <a:t>CE</a:t>
+              <a:t>AM</a:t>
             </a:r>
           </a:p>
         </p:txBody>
@@ -11097,7 +11097,7 @@
                   <a:srgbClr val="212121"/>
                 </a:solidFill>
               </a:rPr>
-              <a:t>Ceará</a:t>
+              <a:t>Amazonas</a:t>
             </a:r>
           </a:p>
         </p:txBody>
@@ -11131,7 +11131,7 @@
                   <a:srgbClr val="555555"/>
                 </a:solidFill>
               </a:rPr>
-              <a:t>R$ 225,015</a:t>
+              <a:t>R$ 27,967</a:t>
             </a:r>
           </a:p>
         </p:txBody>
@@ -11165,7 +11165,7 @@
                   <a:srgbClr val="0D47A1"/>
                 </a:solidFill>
               </a:rPr>
-              <a:t>R$ 532,073</a:t>
+              <a:t>R$ 240,885</a:t>
             </a:r>
           </a:p>
         </p:txBody>
@@ -11199,7 +11199,7 @@
                   <a:srgbClr val="2E7D32"/>
                 </a:solidFill>
               </a:rPr>
-              <a:t>+R$ 307,058</a:t>
+              <a:t>+R$ 212,918</a:t>
             </a:r>
           </a:p>
         </p:txBody>
@@ -11233,7 +11233,7 @@
                   <a:srgbClr val="555555"/>
                 </a:solidFill>
               </a:rPr>
-              <a:t>R$ 288B</a:t>
+              <a:t>R$ 138B</a:t>
             </a:r>
           </a:p>
         </p:txBody>
@@ -11310,7 +11310,7 @@
                   <a:srgbClr val="2E7D32"/>
                 </a:solidFill>
               </a:rPr>
-              <a:t>GO</a:t>
+              <a:t>BA</a:t>
             </a:r>
           </a:p>
         </p:txBody>
@@ -11344,7 +11344,7 @@
                   <a:srgbClr val="212121"/>
                 </a:solidFill>
               </a:rPr>
-              <a:t>Goiás</a:t>
+              <a:t>Bahia</a:t>
             </a:r>
           </a:p>
         </p:txBody>
@@ -11378,7 +11378,7 @@
                   <a:srgbClr val="555555"/>
                 </a:solidFill>
               </a:rPr>
-              <a:t>R$ 283,018</a:t>
+              <a:t>R$ 616,646</a:t>
             </a:r>
           </a:p>
         </p:txBody>
@@ -11412,7 +11412,7 @@
                   <a:srgbClr val="0D47A1"/>
                 </a:solidFill>
               </a:rPr>
-              <a:t>R$ 484,458</a:t>
+              <a:t>R$ 781,537</a:t>
             </a:r>
           </a:p>
         </p:txBody>
@@ -11446,7 +11446,7 @@
                   <a:srgbClr val="2E7D32"/>
                 </a:solidFill>
               </a:rPr>
-              <a:t>+R$ 201,440</a:t>
+              <a:t>+R$ 164,891</a:t>
             </a:r>
           </a:p>
         </p:txBody>
@@ -11480,7 +11480,7 @@
                   <a:srgbClr val="555555"/>
                 </a:solidFill>
               </a:rPr>
-              <a:t>R$ 263B</a:t>
+              <a:t>R$ 447B</a:t>
             </a:r>
           </a:p>
         </p:txBody>
@@ -11559,7 +11559,7 @@
                   <a:srgbClr val="2E7D32"/>
                 </a:solidFill>
               </a:rPr>
-              <a:t>📈  Total projected revenue increase from 5 growth markets:  R$ 1,499,677 ≈ R$ 1.5M</a:t>
+              <a:t>📈  Total projected revenue increase from 5 growth markets:  R$ 1,120,621 ≈ R$ 1.1M</a:t>
             </a:r>
           </a:p>
         </p:txBody>
@@ -12400,7 +12400,7 @@
                   <a:srgbClr val="212121"/>
                 </a:solidFill>
               </a:rPr>
-              <a:t>• Target: PR · BA · PE · CE · GO (positive gap index)</a:t>
+              <a:t>• Target: PA · CE · PE · AM · BA (positive gap index)</a:t>
             </a:r>
           </a:p>
         </p:txBody>
@@ -12434,7 +12434,7 @@
                   <a:srgbClr val="212121"/>
                 </a:solidFill>
               </a:rPr>
-              <a:t>• Potential: R$ 1.5M additional revenue if penetration matches top-3 average</a:t>
+              <a:t>• Potential: ~R$1.1M additional revenue if penetration matches top-3 average</a:t>
             </a:r>
           </a:p>
         </p:txBody>
@@ -12468,7 +12468,7 @@
                   <a:srgbClr val="212121"/>
                 </a:solidFill>
               </a:rPr>
-              <a:t>• PR largest single opportunity: +R$ 355K projected increase</a:t>
+              <a:t>• PA largest single opportunity: +R$301K projected increase</a:t>
             </a:r>
           </a:p>
         </p:txBody>
@@ -14529,7 +14529,7 @@
                   <a:srgbClr val="212121"/>
                 </a:solidFill>
               </a:rPr>
-              <a:t>Monthly revenue_intensity monitoring for PR, BA, PE, CE &amp; GO. Automated alerts when gap index narrows below threshold.</a:t>
+              <a:t>Monthly revenue_intensity monitoring for PA, CE, PE, AM &amp; BA. Automated alerts when gap index narrows below threshold.</a:t>
             </a:r>
           </a:p>
         </p:txBody>
@@ -16489,8 +16489,8 @@
                   <a:srgbClr val="212121"/>
                 </a:solidFill>
               </a:rPr>
-              <a:t>R$ 1.5M revenue growth opportunity identified
-in 5 underserved mid-tier states.
+              <a:t>~R$1.1M revenue growth opportunity identified
+in 5 underserved markets (PA, CE, PE, AM, BA).
 Top 3 product categories prioritised.
 Automated, repeatable pipeline.</a:t>
             </a:r>
@@ -16967,7 +16967,7 @@
                 </a:solidFill>
               </a:rPr>
               <a:t>→  Continue expansion in SP, RJ &amp; MG (high-GDP states)
-→  Target 5 underserved markets: PR, BA, PE, CE &amp; GO
+→  Target 5 underserved markets: PA, CE, PE, AM &amp; BA
 →  Optimise product category mix based on revenue data</a:t>
             </a:r>
           </a:p>
@@ -17081,7 +17081,7 @@
                   <a:srgbClr val="E65100"/>
                 </a:solidFill>
               </a:rPr>
-              <a:t>R$ 16.0M</a:t>
+              <a:t>R$15.9M</a:t>
             </a:r>
           </a:p>
         </p:txBody>
@@ -17149,7 +17149,7 @@
                   <a:srgbClr val="E65100"/>
                 </a:solidFill>
               </a:rPr>
-              <a:t>99,441</a:t>
+              <a:t>98,673</a:t>
             </a:r>
           </a:p>
         </p:txBody>
@@ -17217,7 +17217,7 @@
                   <a:srgbClr val="E65100"/>
                 </a:solidFill>
               </a:rPr>
-              <a:t>R$ 1.5M</a:t>
+              <a:t>~R$1.1M</a:t>
             </a:r>
           </a:p>
         </p:txBody>
@@ -17285,7 +17285,7 @@
                   <a:srgbClr val="E65100"/>
                 </a:solidFill>
               </a:rPr>
-              <a:t>93.2%</a:t>
+              <a:t>93.3%</a:t>
             </a:r>
           </a:p>
         </p:txBody>
@@ -23847,7 +23847,7 @@
                   <a:srgbClr val="0D47A1"/>
                 </a:solidFill>
               </a:rPr>
-              <a:t>R$ 16.0M</a:t>
+              <a:t>R$15.9M</a:t>
             </a:r>
           </a:p>
         </p:txBody>
@@ -24037,7 +24037,7 @@
                   <a:srgbClr val="2E7D32"/>
                 </a:solidFill>
               </a:rPr>
-              <a:t>99,441</a:t>
+              <a:t>98,673</a:t>
             </a:r>
           </a:p>
         </p:txBody>
@@ -24227,7 +24227,7 @@
                   <a:srgbClr val="E65100"/>
                 </a:solidFill>
               </a:rPr>
-              <a:t>4.05 / 5</a:t>
+              <a:t>4.09 / 5</a:t>
             </a:r>
           </a:p>
         </p:txBody>
@@ -24417,7 +24417,7 @@
                   <a:srgbClr val="6A1B9A"/>
                 </a:solidFill>
               </a:rPr>
-              <a:t>93.2%</a:t>
+              <a:t>93.3%</a:t>
             </a:r>
           </a:p>
         </p:txBody>
